--- a/dist/초2/국어/이야기와쓰기/초2_국어_이야기와쓰기_03_겪은일쓰기_학생용.pptx
+++ b/dist/초2/국어/이야기와쓰기/초2_국어_이야기와쓰기_03_겪은일쓰기_학생용.pptx
@@ -118,13 +118,13 @@
   <p:extLst>
     <p:ext uri="{521415D9-36F7-43E2-AB2F-B90AF26B5E84}">
       <p14:sectionLst xmlns:p14="http://schemas.microsoft.com/office/powerpoint/2010/main">
-        <p14:section name="도입" id="{aaab6f7b-249d-333d-333e-0f742ec7a79f}">
+        <p14:section name="도입" id="{cf931903-ed9d-8daa-457e-daadd2154266}">
           <p14:sldIdLst>
             <p14:sldId id="256"/>
             <p14:sldId id="257"/>
           </p14:sldIdLst>
         </p14:section>
-        <p14:section name="개념" id="{b850a504-3035-8170-464f-5babb34e14a2}">
+        <p14:section name="개념" id="{1b5e671f-8097-9f2e-ff07-868f1970c4c7}">
           <p14:sldIdLst>
             <p14:sldId id="258"/>
             <p14:sldId id="259"/>
@@ -132,24 +132,24 @@
             <p14:sldId id="261"/>
           </p14:sldIdLst>
         </p14:section>
-        <p14:section name="연습" id="{9281c878-4882-dc78-42cd-e0b55e353a02}">
+        <p14:section name="연습" id="{b39231c8-c381-dc9e-4e7c-b9df0808d4cc}">
           <p14:sldIdLst>
             <p14:sldId id="262"/>
             <p14:sldId id="263"/>
           </p14:sldIdLst>
         </p14:section>
-        <p14:section name="확인" id="{cd82c77d-e1be-e97f-54da-a2989e481368}">
+        <p14:section name="확인" id="{2a7c045a-6960-77fa-c78f-948f11b4d2bb}">
           <p14:sldIdLst>
             <p14:sldId id="264"/>
             <p14:sldId id="265"/>
           </p14:sldIdLst>
         </p14:section>
-        <p14:section name="정리" id="{34f4cceb-a9e5-295d-27f0-dab1b7979d61}">
+        <p14:section name="정리" id="{0da29bbb-2506-c524-34b6-b4b21db72be8}">
           <p14:sldIdLst>
             <p14:sldId id="266"/>
           </p14:sldIdLst>
         </p14:section>
-        <p14:section name="보충" id="{6ec25290-cb5a-9131-8d47-46ef34497946}">
+        <p14:section name="보충" id="{dd81f30d-0a5c-646a-79d2-191cc64477f3}">
           <p14:sldIdLst>
             <p14:sldId id="267"/>
           </p14:sldIdLst>
